--- a/tests/testdata/excel/PowerPoint/高度.pptx
+++ b/tests/testdata/excel/PowerPoint/高度.pptx
@@ -193,7 +193,7 @@
             </a:lvl1pPr>
           </a:lstStyle>
           <a:p>
-            <a:fld id="{3B279948-663D-4B42-84C7-CFD13262ED8C}" type="datetimeFigureOut">
+            <a:fld id="{8B7B7F3F-B547-4F37-9F2C-D30AAD6BE09E}" type="datetimeFigureOut">
               <a:rPr kumimoji="1" lang="ja-JP" altLang="en-US" smtClean="0"/>
               <a:t>2026/9/20</a:t>
             </a:fld>
@@ -383,7 +383,7 @@
             </a:lvl1pPr>
           </a:lstStyle>
           <a:p>
-            <a:fld id="{8BBC0BCC-8C88-4FFC-9E16-AA001E15E202}" type="slidenum">
+            <a:fld id="{2DAB5633-2128-440A-9F9B-7B341EA65399}" type="slidenum">
               <a:rPr kumimoji="1" lang="ja-JP" altLang="en-US" smtClean="0"/>
               <a:t>‹#›</a:t>
             </a:fld>
@@ -394,7 +394,7 @@
     </p:spTree>
     <p:extLst>
       <p:ext uri="{BB962C8B-B14F-4D97-AF65-F5344CB8AC3E}">
-        <p14:creationId xmlns:p14="http://schemas.microsoft.com/office/powerpoint/2010/main" val="3811161635"/>
+        <p14:creationId xmlns:p14="http://schemas.microsoft.com/office/powerpoint/2010/main" val="1780022291"/>
       </p:ext>
     </p:extLst>
   </p:cSld>
@@ -1140,7 +1140,7 @@
           <a:bodyPr/>
           <a:lstStyle/>
           <a:p>
-            <a:fld id="{8BBC0BCC-8C88-4FFC-9E16-AA001E15E202}" type="slidenum">
+            <a:fld id="{2DAB5633-2128-440A-9F9B-7B341EA65399}" type="slidenum">
               <a:rPr kumimoji="1" lang="ja-JP" altLang="en-US" smtClean="0"/>
               <a:t>1</a:t>
             </a:fld>
@@ -1151,7 +1151,7 @@
     </p:spTree>
     <p:extLst>
       <p:ext uri="{BB962C8B-B14F-4D97-AF65-F5344CB8AC3E}">
-        <p14:creationId xmlns:p14="http://schemas.microsoft.com/office/powerpoint/2010/main" val="2647250422"/>
+        <p14:creationId xmlns:p14="http://schemas.microsoft.com/office/powerpoint/2010/main" val="115326019"/>
       </p:ext>
     </p:extLst>
   </p:cSld>
@@ -1231,7 +1231,7 @@
           <a:bodyPr/>
           <a:lstStyle/>
           <a:p>
-            <a:fld id="{8BBC0BCC-8C88-4FFC-9E16-AA001E15E202}" type="slidenum">
+            <a:fld id="{2DAB5633-2128-440A-9F9B-7B341EA65399}" type="slidenum">
               <a:rPr kumimoji="1" lang="ja-JP" altLang="en-US" smtClean="0"/>
               <a:t>4</a:t>
             </a:fld>
@@ -1242,7 +1242,7 @@
     </p:spTree>
     <p:extLst>
       <p:ext uri="{BB962C8B-B14F-4D97-AF65-F5344CB8AC3E}">
-        <p14:creationId xmlns:p14="http://schemas.microsoft.com/office/powerpoint/2010/main" val="935898098"/>
+        <p14:creationId xmlns:p14="http://schemas.microsoft.com/office/powerpoint/2010/main" val="3500890447"/>
       </p:ext>
     </p:extLst>
   </p:cSld>
@@ -1274,7 +1274,7 @@
           <p:cNvPr id="2" name="タイトル 1">
             <a:extLst>
               <a:ext uri="{FF2B5EF4-FFF2-40B4-BE49-F238E27FC236}">
-                <a16:creationId xmlns:a16="http://schemas.microsoft.com/office/drawing/2014/main" id="{3FD04109-9BA6-9580-C9A6-0682C0D46DC3}"/>
+                <a16:creationId xmlns:a16="http://schemas.microsoft.com/office/drawing/2014/main" id="{3C12CD8D-C84B-2859-B671-4C07360204FC}"/>
               </a:ext>
             </a:extLst>
           </p:cNvPr>
@@ -1311,7 +1311,7 @@
           <p:cNvPr id="3" name="字幕 2">
             <a:extLst>
               <a:ext uri="{FF2B5EF4-FFF2-40B4-BE49-F238E27FC236}">
-                <a16:creationId xmlns:a16="http://schemas.microsoft.com/office/drawing/2014/main" id="{B432E0F0-6FA2-DF42-1C98-7AC4583FAA05}"/>
+                <a16:creationId xmlns:a16="http://schemas.microsoft.com/office/drawing/2014/main" id="{5A3A23B4-7191-C01C-5544-621A6C2DC2BE}"/>
               </a:ext>
             </a:extLst>
           </p:cNvPr>
@@ -1381,7 +1381,7 @@
           <p:cNvPr id="4" name="日付プレースホルダー 3">
             <a:extLst>
               <a:ext uri="{FF2B5EF4-FFF2-40B4-BE49-F238E27FC236}">
-                <a16:creationId xmlns:a16="http://schemas.microsoft.com/office/drawing/2014/main" id="{28B38D66-11CC-9931-C8C4-64E949975D8A}"/>
+                <a16:creationId xmlns:a16="http://schemas.microsoft.com/office/drawing/2014/main" id="{43961AF5-75A0-7D5D-B997-EB16355E84B2}"/>
               </a:ext>
             </a:extLst>
           </p:cNvPr>
@@ -1397,7 +1397,7 @@
           <a:bodyPr/>
           <a:lstStyle/>
           <a:p>
-            <a:fld id="{953AA427-D7FD-4C74-8FA9-E94E52A66923}" type="datetimeFigureOut">
+            <a:fld id="{41C390E4-A52A-43AE-970C-3906C9BD5394}" type="datetimeFigureOut">
               <a:rPr kumimoji="1" lang="ja-JP" altLang="en-US" smtClean="0"/>
               <a:t>2026/9/20</a:t>
             </a:fld>
@@ -1410,7 +1410,7 @@
           <p:cNvPr id="5" name="フッター プレースホルダー 4">
             <a:extLst>
               <a:ext uri="{FF2B5EF4-FFF2-40B4-BE49-F238E27FC236}">
-                <a16:creationId xmlns:a16="http://schemas.microsoft.com/office/drawing/2014/main" id="{0126C015-9C81-AF25-9F31-A02306DA44C4}"/>
+                <a16:creationId xmlns:a16="http://schemas.microsoft.com/office/drawing/2014/main" id="{BDE2828E-11F4-3857-9ED6-E804D58AC671}"/>
               </a:ext>
             </a:extLst>
           </p:cNvPr>
@@ -1435,7 +1435,7 @@
           <p:cNvPr id="6" name="スライド番号プレースホルダー 5">
             <a:extLst>
               <a:ext uri="{FF2B5EF4-FFF2-40B4-BE49-F238E27FC236}">
-                <a16:creationId xmlns:a16="http://schemas.microsoft.com/office/drawing/2014/main" id="{5E424A57-A7D7-1499-CCB2-142278F98898}"/>
+                <a16:creationId xmlns:a16="http://schemas.microsoft.com/office/drawing/2014/main" id="{4822FCFD-32FE-6C28-EB74-A2A71BA22828}"/>
               </a:ext>
             </a:extLst>
           </p:cNvPr>
@@ -1451,7 +1451,7 @@
           <a:bodyPr/>
           <a:lstStyle/>
           <a:p>
-            <a:fld id="{6CA20B12-B2B9-4A31-BD02-1320745D9B7B}" type="slidenum">
+            <a:fld id="{DAD30DFD-62C4-4ADF-98A6-152EB2A2F554}" type="slidenum">
               <a:rPr kumimoji="1" lang="ja-JP" altLang="en-US" smtClean="0"/>
               <a:t>‹#›</a:t>
             </a:fld>
@@ -1462,7 +1462,7 @@
     </p:spTree>
     <p:extLst>
       <p:ext uri="{BB962C8B-B14F-4D97-AF65-F5344CB8AC3E}">
-        <p14:creationId xmlns:p14="http://schemas.microsoft.com/office/powerpoint/2010/main" val="1251255457"/>
+        <p14:creationId xmlns:p14="http://schemas.microsoft.com/office/powerpoint/2010/main" val="1448582996"/>
       </p:ext>
     </p:extLst>
   </p:cSld>
@@ -1494,7 +1494,7 @@
           <p:cNvPr id="2" name="タイトル 1">
             <a:extLst>
               <a:ext uri="{FF2B5EF4-FFF2-40B4-BE49-F238E27FC236}">
-                <a16:creationId xmlns:a16="http://schemas.microsoft.com/office/drawing/2014/main" id="{BC3FA06E-CC6D-F99B-8130-B7CBA79031AF}"/>
+                <a16:creationId xmlns:a16="http://schemas.microsoft.com/office/drawing/2014/main" id="{6F2623E9-86C3-A75A-D319-5A659A1B0300}"/>
               </a:ext>
             </a:extLst>
           </p:cNvPr>
@@ -1522,7 +1522,7 @@
           <p:cNvPr id="3" name="縦書きテキスト プレースホルダー 2">
             <a:extLst>
               <a:ext uri="{FF2B5EF4-FFF2-40B4-BE49-F238E27FC236}">
-                <a16:creationId xmlns:a16="http://schemas.microsoft.com/office/drawing/2014/main" id="{2213073C-7221-A897-1027-0FCDDED64885}"/>
+                <a16:creationId xmlns:a16="http://schemas.microsoft.com/office/drawing/2014/main" id="{056C2E4C-E2A0-8ECD-7353-1811222CAFCD}"/>
               </a:ext>
             </a:extLst>
           </p:cNvPr>
@@ -1611,7 +1611,7 @@
           <p:cNvPr id="4" name="日付プレースホルダー 3">
             <a:extLst>
               <a:ext uri="{FF2B5EF4-FFF2-40B4-BE49-F238E27FC236}">
-                <a16:creationId xmlns:a16="http://schemas.microsoft.com/office/drawing/2014/main" id="{81988DF7-2347-CB51-9CFB-04D966DBAB29}"/>
+                <a16:creationId xmlns:a16="http://schemas.microsoft.com/office/drawing/2014/main" id="{5B20900A-8EA2-35FB-E150-5CE734837BEE}"/>
               </a:ext>
             </a:extLst>
           </p:cNvPr>
@@ -1627,7 +1627,7 @@
           <a:bodyPr/>
           <a:lstStyle/>
           <a:p>
-            <a:fld id="{953AA427-D7FD-4C74-8FA9-E94E52A66923}" type="datetimeFigureOut">
+            <a:fld id="{41C390E4-A52A-43AE-970C-3906C9BD5394}" type="datetimeFigureOut">
               <a:rPr kumimoji="1" lang="ja-JP" altLang="en-US" smtClean="0"/>
               <a:t>2026/9/20</a:t>
             </a:fld>
@@ -1640,7 +1640,7 @@
           <p:cNvPr id="5" name="フッター プレースホルダー 4">
             <a:extLst>
               <a:ext uri="{FF2B5EF4-FFF2-40B4-BE49-F238E27FC236}">
-                <a16:creationId xmlns:a16="http://schemas.microsoft.com/office/drawing/2014/main" id="{70325FE7-BEAB-17C6-193C-981320F338D2}"/>
+                <a16:creationId xmlns:a16="http://schemas.microsoft.com/office/drawing/2014/main" id="{D645037D-A42D-0F90-F8A2-0A3B5EE8B1FA}"/>
               </a:ext>
             </a:extLst>
           </p:cNvPr>
@@ -1665,7 +1665,7 @@
           <p:cNvPr id="6" name="スライド番号プレースホルダー 5">
             <a:extLst>
               <a:ext uri="{FF2B5EF4-FFF2-40B4-BE49-F238E27FC236}">
-                <a16:creationId xmlns:a16="http://schemas.microsoft.com/office/drawing/2014/main" id="{1C03AAD9-5FF2-7155-6ECB-6AEB7A6FCB5D}"/>
+                <a16:creationId xmlns:a16="http://schemas.microsoft.com/office/drawing/2014/main" id="{F82129BB-43B0-18D6-22F2-5B2060FBB791}"/>
               </a:ext>
             </a:extLst>
           </p:cNvPr>
@@ -1681,7 +1681,7 @@
           <a:bodyPr/>
           <a:lstStyle/>
           <a:p>
-            <a:fld id="{6CA20B12-B2B9-4A31-BD02-1320745D9B7B}" type="slidenum">
+            <a:fld id="{DAD30DFD-62C4-4ADF-98A6-152EB2A2F554}" type="slidenum">
               <a:rPr kumimoji="1" lang="ja-JP" altLang="en-US" smtClean="0"/>
               <a:t>‹#›</a:t>
             </a:fld>
@@ -1692,7 +1692,7 @@
     </p:spTree>
     <p:extLst>
       <p:ext uri="{BB962C8B-B14F-4D97-AF65-F5344CB8AC3E}">
-        <p14:creationId xmlns:p14="http://schemas.microsoft.com/office/powerpoint/2010/main" val="891568676"/>
+        <p14:creationId xmlns:p14="http://schemas.microsoft.com/office/powerpoint/2010/main" val="3535255328"/>
       </p:ext>
     </p:extLst>
   </p:cSld>
@@ -1724,7 +1724,7 @@
           <p:cNvPr id="2" name="縦書きタイトル 1">
             <a:extLst>
               <a:ext uri="{FF2B5EF4-FFF2-40B4-BE49-F238E27FC236}">
-                <a16:creationId xmlns:a16="http://schemas.microsoft.com/office/drawing/2014/main" id="{4DD934AB-5636-67CB-C06D-DC265DD77084}"/>
+                <a16:creationId xmlns:a16="http://schemas.microsoft.com/office/drawing/2014/main" id="{9BDFE078-3669-DF2A-2111-0C647B398B47}"/>
               </a:ext>
             </a:extLst>
           </p:cNvPr>
@@ -1757,7 +1757,7 @@
           <p:cNvPr id="3" name="縦書きテキスト プレースホルダー 2">
             <a:extLst>
               <a:ext uri="{FF2B5EF4-FFF2-40B4-BE49-F238E27FC236}">
-                <a16:creationId xmlns:a16="http://schemas.microsoft.com/office/drawing/2014/main" id="{97903965-7A66-EDF2-732B-7711BC5FE760}"/>
+                <a16:creationId xmlns:a16="http://schemas.microsoft.com/office/drawing/2014/main" id="{971349F1-8B67-489D-6041-3E3C42CFF2F6}"/>
               </a:ext>
             </a:extLst>
           </p:cNvPr>
@@ -1851,7 +1851,7 @@
           <p:cNvPr id="4" name="日付プレースホルダー 3">
             <a:extLst>
               <a:ext uri="{FF2B5EF4-FFF2-40B4-BE49-F238E27FC236}">
-                <a16:creationId xmlns:a16="http://schemas.microsoft.com/office/drawing/2014/main" id="{64B5D132-868F-44CE-D640-8E81229253E6}"/>
+                <a16:creationId xmlns:a16="http://schemas.microsoft.com/office/drawing/2014/main" id="{3747958E-5926-9089-B46C-B0DABE819ECD}"/>
               </a:ext>
             </a:extLst>
           </p:cNvPr>
@@ -1867,7 +1867,7 @@
           <a:bodyPr/>
           <a:lstStyle/>
           <a:p>
-            <a:fld id="{953AA427-D7FD-4C74-8FA9-E94E52A66923}" type="datetimeFigureOut">
+            <a:fld id="{41C390E4-A52A-43AE-970C-3906C9BD5394}" type="datetimeFigureOut">
               <a:rPr kumimoji="1" lang="ja-JP" altLang="en-US" smtClean="0"/>
               <a:t>2026/9/20</a:t>
             </a:fld>
@@ -1880,7 +1880,7 @@
           <p:cNvPr id="5" name="フッター プレースホルダー 4">
             <a:extLst>
               <a:ext uri="{FF2B5EF4-FFF2-40B4-BE49-F238E27FC236}">
-                <a16:creationId xmlns:a16="http://schemas.microsoft.com/office/drawing/2014/main" id="{76A359CD-F9F9-F7C2-A024-BC525B55615B}"/>
+                <a16:creationId xmlns:a16="http://schemas.microsoft.com/office/drawing/2014/main" id="{EAE9F758-66CE-C0C4-61CA-BB645F8979E9}"/>
               </a:ext>
             </a:extLst>
           </p:cNvPr>
@@ -1905,7 +1905,7 @@
           <p:cNvPr id="6" name="スライド番号プレースホルダー 5">
             <a:extLst>
               <a:ext uri="{FF2B5EF4-FFF2-40B4-BE49-F238E27FC236}">
-                <a16:creationId xmlns:a16="http://schemas.microsoft.com/office/drawing/2014/main" id="{7C83247F-05ED-A3B8-C07A-1080E4AAA110}"/>
+                <a16:creationId xmlns:a16="http://schemas.microsoft.com/office/drawing/2014/main" id="{D9043909-C700-715E-91DE-6515F77185D7}"/>
               </a:ext>
             </a:extLst>
           </p:cNvPr>
@@ -1921,7 +1921,7 @@
           <a:bodyPr/>
           <a:lstStyle/>
           <a:p>
-            <a:fld id="{6CA20B12-B2B9-4A31-BD02-1320745D9B7B}" type="slidenum">
+            <a:fld id="{DAD30DFD-62C4-4ADF-98A6-152EB2A2F554}" type="slidenum">
               <a:rPr kumimoji="1" lang="ja-JP" altLang="en-US" smtClean="0"/>
               <a:t>‹#›</a:t>
             </a:fld>
@@ -1932,7 +1932,7 @@
     </p:spTree>
     <p:extLst>
       <p:ext uri="{BB962C8B-B14F-4D97-AF65-F5344CB8AC3E}">
-        <p14:creationId xmlns:p14="http://schemas.microsoft.com/office/powerpoint/2010/main" val="3250955232"/>
+        <p14:creationId xmlns:p14="http://schemas.microsoft.com/office/powerpoint/2010/main" val="1897516411"/>
       </p:ext>
     </p:extLst>
   </p:cSld>
@@ -1964,7 +1964,7 @@
           <p:cNvPr id="2" name="タイトル 1">
             <a:extLst>
               <a:ext uri="{FF2B5EF4-FFF2-40B4-BE49-F238E27FC236}">
-                <a16:creationId xmlns:a16="http://schemas.microsoft.com/office/drawing/2014/main" id="{6FB8DAC6-F309-166A-80A6-020B7E2CA162}"/>
+                <a16:creationId xmlns:a16="http://schemas.microsoft.com/office/drawing/2014/main" id="{D3B4F8C5-C285-2FC0-096B-5369BD89F5BC}"/>
               </a:ext>
             </a:extLst>
           </p:cNvPr>
@@ -1992,7 +1992,7 @@
           <p:cNvPr id="3" name="テキスト プレースホルダー 2">
             <a:extLst>
               <a:ext uri="{FF2B5EF4-FFF2-40B4-BE49-F238E27FC236}">
-                <a16:creationId xmlns:a16="http://schemas.microsoft.com/office/drawing/2014/main" id="{F12B953F-F25B-87E2-E9E9-C1314B8704B7}"/>
+                <a16:creationId xmlns:a16="http://schemas.microsoft.com/office/drawing/2014/main" id="{C3938A8F-2D7E-472F-5BB6-06E9543ACBD4}"/>
               </a:ext>
             </a:extLst>
           </p:cNvPr>
@@ -2081,7 +2081,7 @@
           <p:cNvPr id="4" name="日付プレースホルダー 3">
             <a:extLst>
               <a:ext uri="{FF2B5EF4-FFF2-40B4-BE49-F238E27FC236}">
-                <a16:creationId xmlns:a16="http://schemas.microsoft.com/office/drawing/2014/main" id="{2AD4A252-CF33-7644-C1B9-6DE3405FD58A}"/>
+                <a16:creationId xmlns:a16="http://schemas.microsoft.com/office/drawing/2014/main" id="{4253EC62-7714-AAC3-0D6D-E5E1D011E464}"/>
               </a:ext>
             </a:extLst>
           </p:cNvPr>
@@ -2097,7 +2097,7 @@
           <a:bodyPr/>
           <a:lstStyle/>
           <a:p>
-            <a:fld id="{953AA427-D7FD-4C74-8FA9-E94E52A66923}" type="datetimeFigureOut">
+            <a:fld id="{41C390E4-A52A-43AE-970C-3906C9BD5394}" type="datetimeFigureOut">
               <a:rPr kumimoji="1" lang="ja-JP" altLang="en-US" smtClean="0"/>
               <a:t>2026/9/20</a:t>
             </a:fld>
@@ -2110,7 +2110,7 @@
           <p:cNvPr id="5" name="フッター プレースホルダー 4">
             <a:extLst>
               <a:ext uri="{FF2B5EF4-FFF2-40B4-BE49-F238E27FC236}">
-                <a16:creationId xmlns:a16="http://schemas.microsoft.com/office/drawing/2014/main" id="{3D88B0CC-73F4-D2F7-7508-BD926978FB73}"/>
+                <a16:creationId xmlns:a16="http://schemas.microsoft.com/office/drawing/2014/main" id="{CCB9F998-DDDC-5854-83A4-F2BCB61CB274}"/>
               </a:ext>
             </a:extLst>
           </p:cNvPr>
@@ -2135,7 +2135,7 @@
           <p:cNvPr id="6" name="スライド番号プレースホルダー 5">
             <a:extLst>
               <a:ext uri="{FF2B5EF4-FFF2-40B4-BE49-F238E27FC236}">
-                <a16:creationId xmlns:a16="http://schemas.microsoft.com/office/drawing/2014/main" id="{09153DD8-D9EA-7B1B-5F49-1E06B8C29BFD}"/>
+                <a16:creationId xmlns:a16="http://schemas.microsoft.com/office/drawing/2014/main" id="{A2996269-65D0-CE78-14AD-223D2E43AA01}"/>
               </a:ext>
             </a:extLst>
           </p:cNvPr>
@@ -2151,7 +2151,7 @@
           <a:bodyPr/>
           <a:lstStyle/>
           <a:p>
-            <a:fld id="{6CA20B12-B2B9-4A31-BD02-1320745D9B7B}" type="slidenum">
+            <a:fld id="{DAD30DFD-62C4-4ADF-98A6-152EB2A2F554}" type="slidenum">
               <a:rPr kumimoji="1" lang="ja-JP" altLang="en-US" smtClean="0"/>
               <a:t>‹#›</a:t>
             </a:fld>
@@ -2164,7 +2164,7 @@
           <p:cNvPr id="7" name="テキスト ボックス 6">
             <a:extLst>
               <a:ext uri="{FF2B5EF4-FFF2-40B4-BE49-F238E27FC236}">
-                <a16:creationId xmlns:a16="http://schemas.microsoft.com/office/drawing/2014/main" id="{CC32973C-7458-D254-7D4F-7F5857A33E32}"/>
+                <a16:creationId xmlns:a16="http://schemas.microsoft.com/office/drawing/2014/main" id="{DE33037D-2FB0-742C-BE66-E79F87C96121}"/>
               </a:ext>
             </a:extLst>
           </p:cNvPr>
@@ -2201,7 +2201,7 @@
     </p:spTree>
     <p:extLst>
       <p:ext uri="{BB962C8B-B14F-4D97-AF65-F5344CB8AC3E}">
-        <p14:creationId xmlns:p14="http://schemas.microsoft.com/office/powerpoint/2010/main" val="766652781"/>
+        <p14:creationId xmlns:p14="http://schemas.microsoft.com/office/powerpoint/2010/main" val="1194655028"/>
       </p:ext>
     </p:extLst>
   </p:cSld>
@@ -2233,7 +2233,7 @@
           <p:cNvPr id="2" name="タイトル 1">
             <a:extLst>
               <a:ext uri="{FF2B5EF4-FFF2-40B4-BE49-F238E27FC236}">
-                <a16:creationId xmlns:a16="http://schemas.microsoft.com/office/drawing/2014/main" id="{F09B0001-4048-0124-DB30-4E608A2313AD}"/>
+                <a16:creationId xmlns:a16="http://schemas.microsoft.com/office/drawing/2014/main" id="{E99299FE-5FBC-902B-244D-6061BB392E0D}"/>
               </a:ext>
             </a:extLst>
           </p:cNvPr>
@@ -2261,7 +2261,7 @@
           <p:cNvPr id="3" name="コンテンツ プレースホルダー 2">
             <a:extLst>
               <a:ext uri="{FF2B5EF4-FFF2-40B4-BE49-F238E27FC236}">
-                <a16:creationId xmlns:a16="http://schemas.microsoft.com/office/drawing/2014/main" id="{6E786236-88B4-48B4-9A96-7C6098CE0451}"/>
+                <a16:creationId xmlns:a16="http://schemas.microsoft.com/office/drawing/2014/main" id="{42B99A67-01E6-46A3-F95C-777EC56C9FCF}"/>
               </a:ext>
             </a:extLst>
           </p:cNvPr>
@@ -2350,7 +2350,7 @@
           <p:cNvPr id="4" name="日付プレースホルダー 3">
             <a:extLst>
               <a:ext uri="{FF2B5EF4-FFF2-40B4-BE49-F238E27FC236}">
-                <a16:creationId xmlns:a16="http://schemas.microsoft.com/office/drawing/2014/main" id="{721CF783-A0F2-6D83-C205-C50ED3C9088B}"/>
+                <a16:creationId xmlns:a16="http://schemas.microsoft.com/office/drawing/2014/main" id="{E9D1FCB8-C1EF-F9DA-A93B-3EF75EC76053}"/>
               </a:ext>
             </a:extLst>
           </p:cNvPr>
@@ -2366,7 +2366,7 @@
           <a:bodyPr/>
           <a:lstStyle/>
           <a:p>
-            <a:fld id="{953AA427-D7FD-4C74-8FA9-E94E52A66923}" type="datetimeFigureOut">
+            <a:fld id="{41C390E4-A52A-43AE-970C-3906C9BD5394}" type="datetimeFigureOut">
               <a:rPr kumimoji="1" lang="ja-JP" altLang="en-US" smtClean="0"/>
               <a:t>2026/9/20</a:t>
             </a:fld>
@@ -2379,7 +2379,7 @@
           <p:cNvPr id="5" name="フッター プレースホルダー 4">
             <a:extLst>
               <a:ext uri="{FF2B5EF4-FFF2-40B4-BE49-F238E27FC236}">
-                <a16:creationId xmlns:a16="http://schemas.microsoft.com/office/drawing/2014/main" id="{D873F34F-8826-9AAD-5B81-68497A965404}"/>
+                <a16:creationId xmlns:a16="http://schemas.microsoft.com/office/drawing/2014/main" id="{583A7624-3304-8288-926A-4928029ED1E5}"/>
               </a:ext>
             </a:extLst>
           </p:cNvPr>
@@ -2404,7 +2404,7 @@
           <p:cNvPr id="6" name="スライド番号プレースホルダー 5">
             <a:extLst>
               <a:ext uri="{FF2B5EF4-FFF2-40B4-BE49-F238E27FC236}">
-                <a16:creationId xmlns:a16="http://schemas.microsoft.com/office/drawing/2014/main" id="{476CF1A8-F531-94B3-03BA-9B8477F5A86C}"/>
+                <a16:creationId xmlns:a16="http://schemas.microsoft.com/office/drawing/2014/main" id="{5E82CA49-E3A9-2A39-E0A0-868980411AA1}"/>
               </a:ext>
             </a:extLst>
           </p:cNvPr>
@@ -2420,7 +2420,7 @@
           <a:bodyPr/>
           <a:lstStyle/>
           <a:p>
-            <a:fld id="{6CA20B12-B2B9-4A31-BD02-1320745D9B7B}" type="slidenum">
+            <a:fld id="{DAD30DFD-62C4-4ADF-98A6-152EB2A2F554}" type="slidenum">
               <a:rPr kumimoji="1" lang="ja-JP" altLang="en-US" smtClean="0"/>
               <a:t>‹#›</a:t>
             </a:fld>
@@ -2431,7 +2431,7 @@
     </p:spTree>
     <p:extLst>
       <p:ext uri="{BB962C8B-B14F-4D97-AF65-F5344CB8AC3E}">
-        <p14:creationId xmlns:p14="http://schemas.microsoft.com/office/powerpoint/2010/main" val="2713858809"/>
+        <p14:creationId xmlns:p14="http://schemas.microsoft.com/office/powerpoint/2010/main" val="1794831578"/>
       </p:ext>
     </p:extLst>
   </p:cSld>
@@ -2463,7 +2463,7 @@
           <p:cNvPr id="2" name="タイトル 1">
             <a:extLst>
               <a:ext uri="{FF2B5EF4-FFF2-40B4-BE49-F238E27FC236}">
-                <a16:creationId xmlns:a16="http://schemas.microsoft.com/office/drawing/2014/main" id="{8F1F1905-9947-1692-8D90-A511510329A2}"/>
+                <a16:creationId xmlns:a16="http://schemas.microsoft.com/office/drawing/2014/main" id="{BA0D4133-E7CF-73B0-5A64-4DBEEC8379F4}"/>
               </a:ext>
             </a:extLst>
           </p:cNvPr>
@@ -2500,7 +2500,7 @@
           <p:cNvPr id="3" name="テキスト プレースホルダー 2">
             <a:extLst>
               <a:ext uri="{FF2B5EF4-FFF2-40B4-BE49-F238E27FC236}">
-                <a16:creationId xmlns:a16="http://schemas.microsoft.com/office/drawing/2014/main" id="{2135F689-2C9C-4C02-BF78-B938D44E8BA9}"/>
+                <a16:creationId xmlns:a16="http://schemas.microsoft.com/office/drawing/2014/main" id="{6098ABE0-4648-1525-0AD0-9B4C04BE6476}"/>
               </a:ext>
             </a:extLst>
           </p:cNvPr>
@@ -2625,7 +2625,7 @@
           <p:cNvPr id="4" name="日付プレースホルダー 3">
             <a:extLst>
               <a:ext uri="{FF2B5EF4-FFF2-40B4-BE49-F238E27FC236}">
-                <a16:creationId xmlns:a16="http://schemas.microsoft.com/office/drawing/2014/main" id="{3DD88E73-9EF4-2C5F-C8F6-9A588A37EAB4}"/>
+                <a16:creationId xmlns:a16="http://schemas.microsoft.com/office/drawing/2014/main" id="{29850F1A-365A-6A5A-5D5A-7D4BC2787225}"/>
               </a:ext>
             </a:extLst>
           </p:cNvPr>
@@ -2641,7 +2641,7 @@
           <a:bodyPr/>
           <a:lstStyle/>
           <a:p>
-            <a:fld id="{953AA427-D7FD-4C74-8FA9-E94E52A66923}" type="datetimeFigureOut">
+            <a:fld id="{41C390E4-A52A-43AE-970C-3906C9BD5394}" type="datetimeFigureOut">
               <a:rPr kumimoji="1" lang="ja-JP" altLang="en-US" smtClean="0"/>
               <a:t>2026/9/20</a:t>
             </a:fld>
@@ -2654,7 +2654,7 @@
           <p:cNvPr id="5" name="フッター プレースホルダー 4">
             <a:extLst>
               <a:ext uri="{FF2B5EF4-FFF2-40B4-BE49-F238E27FC236}">
-                <a16:creationId xmlns:a16="http://schemas.microsoft.com/office/drawing/2014/main" id="{C23162E6-8E86-36D4-9EAB-95E50B8A0913}"/>
+                <a16:creationId xmlns:a16="http://schemas.microsoft.com/office/drawing/2014/main" id="{BF726D73-DA8B-94CB-2681-6B6790A1134A}"/>
               </a:ext>
             </a:extLst>
           </p:cNvPr>
@@ -2679,7 +2679,7 @@
           <p:cNvPr id="6" name="スライド番号プレースホルダー 5">
             <a:extLst>
               <a:ext uri="{FF2B5EF4-FFF2-40B4-BE49-F238E27FC236}">
-                <a16:creationId xmlns:a16="http://schemas.microsoft.com/office/drawing/2014/main" id="{A1ADC85B-DCCB-C912-C28C-524C20BD77B0}"/>
+                <a16:creationId xmlns:a16="http://schemas.microsoft.com/office/drawing/2014/main" id="{6E1E85D4-FE5B-E682-8AF9-00FE1DD21A7E}"/>
               </a:ext>
             </a:extLst>
           </p:cNvPr>
@@ -2695,7 +2695,7 @@
           <a:bodyPr/>
           <a:lstStyle/>
           <a:p>
-            <a:fld id="{6CA20B12-B2B9-4A31-BD02-1320745D9B7B}" type="slidenum">
+            <a:fld id="{DAD30DFD-62C4-4ADF-98A6-152EB2A2F554}" type="slidenum">
               <a:rPr kumimoji="1" lang="ja-JP" altLang="en-US" smtClean="0"/>
               <a:t>‹#›</a:t>
             </a:fld>
@@ -2706,7 +2706,7 @@
     </p:spTree>
     <p:extLst>
       <p:ext uri="{BB962C8B-B14F-4D97-AF65-F5344CB8AC3E}">
-        <p14:creationId xmlns:p14="http://schemas.microsoft.com/office/powerpoint/2010/main" val="3970369699"/>
+        <p14:creationId xmlns:p14="http://schemas.microsoft.com/office/powerpoint/2010/main" val="759416838"/>
       </p:ext>
     </p:extLst>
   </p:cSld>
@@ -2738,7 +2738,7 @@
           <p:cNvPr id="2" name="タイトル 1">
             <a:extLst>
               <a:ext uri="{FF2B5EF4-FFF2-40B4-BE49-F238E27FC236}">
-                <a16:creationId xmlns:a16="http://schemas.microsoft.com/office/drawing/2014/main" id="{4BE36FB4-E79E-2AE0-3BCA-12D6F9C3DFA4}"/>
+                <a16:creationId xmlns:a16="http://schemas.microsoft.com/office/drawing/2014/main" id="{28954975-31D8-23F3-2BBF-8CC3675955BC}"/>
               </a:ext>
             </a:extLst>
           </p:cNvPr>
@@ -2766,7 +2766,7 @@
           <p:cNvPr id="3" name="コンテンツ プレースホルダー 2">
             <a:extLst>
               <a:ext uri="{FF2B5EF4-FFF2-40B4-BE49-F238E27FC236}">
-                <a16:creationId xmlns:a16="http://schemas.microsoft.com/office/drawing/2014/main" id="{4E09C3D1-2004-F89F-BA21-18F9A6090281}"/>
+                <a16:creationId xmlns:a16="http://schemas.microsoft.com/office/drawing/2014/main" id="{FA83128B-C1B7-3E9B-CE1F-1025B8FE8483}"/>
               </a:ext>
             </a:extLst>
           </p:cNvPr>
@@ -2860,7 +2860,7 @@
           <p:cNvPr id="4" name="コンテンツ プレースホルダー 3">
             <a:extLst>
               <a:ext uri="{FF2B5EF4-FFF2-40B4-BE49-F238E27FC236}">
-                <a16:creationId xmlns:a16="http://schemas.microsoft.com/office/drawing/2014/main" id="{B25467A0-ED7C-64E0-E710-EFD1D593ED9E}"/>
+                <a16:creationId xmlns:a16="http://schemas.microsoft.com/office/drawing/2014/main" id="{9C8D4275-D1B5-6C24-26D7-153316A87599}"/>
               </a:ext>
             </a:extLst>
           </p:cNvPr>
@@ -2954,7 +2954,7 @@
           <p:cNvPr id="5" name="日付プレースホルダー 4">
             <a:extLst>
               <a:ext uri="{FF2B5EF4-FFF2-40B4-BE49-F238E27FC236}">
-                <a16:creationId xmlns:a16="http://schemas.microsoft.com/office/drawing/2014/main" id="{51005C0D-646A-E5C4-40FC-4F67F097DF78}"/>
+                <a16:creationId xmlns:a16="http://schemas.microsoft.com/office/drawing/2014/main" id="{E86B1D79-ADBB-7296-D05F-E59B49E3169F}"/>
               </a:ext>
             </a:extLst>
           </p:cNvPr>
@@ -2970,7 +2970,7 @@
           <a:bodyPr/>
           <a:lstStyle/>
           <a:p>
-            <a:fld id="{953AA427-D7FD-4C74-8FA9-E94E52A66923}" type="datetimeFigureOut">
+            <a:fld id="{41C390E4-A52A-43AE-970C-3906C9BD5394}" type="datetimeFigureOut">
               <a:rPr kumimoji="1" lang="ja-JP" altLang="en-US" smtClean="0"/>
               <a:t>2026/9/20</a:t>
             </a:fld>
@@ -2983,7 +2983,7 @@
           <p:cNvPr id="6" name="フッター プレースホルダー 5">
             <a:extLst>
               <a:ext uri="{FF2B5EF4-FFF2-40B4-BE49-F238E27FC236}">
-                <a16:creationId xmlns:a16="http://schemas.microsoft.com/office/drawing/2014/main" id="{C01A1991-FD60-FBB7-3AD1-6628D892F5A4}"/>
+                <a16:creationId xmlns:a16="http://schemas.microsoft.com/office/drawing/2014/main" id="{5E0B3858-A5B7-6D25-A105-2C048A482306}"/>
               </a:ext>
             </a:extLst>
           </p:cNvPr>
@@ -3008,7 +3008,7 @@
           <p:cNvPr id="7" name="スライド番号プレースホルダー 6">
             <a:extLst>
               <a:ext uri="{FF2B5EF4-FFF2-40B4-BE49-F238E27FC236}">
-                <a16:creationId xmlns:a16="http://schemas.microsoft.com/office/drawing/2014/main" id="{EA30AB45-0553-1F28-9C1F-2B2A9B169E45}"/>
+                <a16:creationId xmlns:a16="http://schemas.microsoft.com/office/drawing/2014/main" id="{067EF2AA-ED01-29DC-F751-B7D43518F3A5}"/>
               </a:ext>
             </a:extLst>
           </p:cNvPr>
@@ -3024,7 +3024,7 @@
           <a:bodyPr/>
           <a:lstStyle/>
           <a:p>
-            <a:fld id="{6CA20B12-B2B9-4A31-BD02-1320745D9B7B}" type="slidenum">
+            <a:fld id="{DAD30DFD-62C4-4ADF-98A6-152EB2A2F554}" type="slidenum">
               <a:rPr kumimoji="1" lang="ja-JP" altLang="en-US" smtClean="0"/>
               <a:t>‹#›</a:t>
             </a:fld>
@@ -3035,7 +3035,7 @@
     </p:spTree>
     <p:extLst>
       <p:ext uri="{BB962C8B-B14F-4D97-AF65-F5344CB8AC3E}">
-        <p14:creationId xmlns:p14="http://schemas.microsoft.com/office/powerpoint/2010/main" val="1248345703"/>
+        <p14:creationId xmlns:p14="http://schemas.microsoft.com/office/powerpoint/2010/main" val="1104883972"/>
       </p:ext>
     </p:extLst>
   </p:cSld>
@@ -3067,7 +3067,7 @@
           <p:cNvPr id="2" name="タイトル 1">
             <a:extLst>
               <a:ext uri="{FF2B5EF4-FFF2-40B4-BE49-F238E27FC236}">
-                <a16:creationId xmlns:a16="http://schemas.microsoft.com/office/drawing/2014/main" id="{DA086DFC-74B5-BDF5-A97E-45F497D6102C}"/>
+                <a16:creationId xmlns:a16="http://schemas.microsoft.com/office/drawing/2014/main" id="{E2456948-7B50-61CF-9214-9A8570CEBDD7}"/>
               </a:ext>
             </a:extLst>
           </p:cNvPr>
@@ -3100,7 +3100,7 @@
           <p:cNvPr id="3" name="テキスト プレースホルダー 2">
             <a:extLst>
               <a:ext uri="{FF2B5EF4-FFF2-40B4-BE49-F238E27FC236}">
-                <a16:creationId xmlns:a16="http://schemas.microsoft.com/office/drawing/2014/main" id="{FAC0BBE3-5158-215D-44DD-A5941F7B383B}"/>
+                <a16:creationId xmlns:a16="http://schemas.microsoft.com/office/drawing/2014/main" id="{EE96DA24-44F0-D82D-25BC-766319695AB3}"/>
               </a:ext>
             </a:extLst>
           </p:cNvPr>
@@ -3171,7 +3171,7 @@
           <p:cNvPr id="4" name="コンテンツ プレースホルダー 3">
             <a:extLst>
               <a:ext uri="{FF2B5EF4-FFF2-40B4-BE49-F238E27FC236}">
-                <a16:creationId xmlns:a16="http://schemas.microsoft.com/office/drawing/2014/main" id="{CBDC5222-5368-3DDF-2C05-1A84FE28CA9A}"/>
+                <a16:creationId xmlns:a16="http://schemas.microsoft.com/office/drawing/2014/main" id="{96D5F571-288B-0B3F-B03D-E182A78C9C37}"/>
               </a:ext>
             </a:extLst>
           </p:cNvPr>
@@ -3265,7 +3265,7 @@
           <p:cNvPr id="5" name="テキスト プレースホルダー 4">
             <a:extLst>
               <a:ext uri="{FF2B5EF4-FFF2-40B4-BE49-F238E27FC236}">
-                <a16:creationId xmlns:a16="http://schemas.microsoft.com/office/drawing/2014/main" id="{D34DA35C-47DD-F217-7F04-2086FEBB6EDD}"/>
+                <a16:creationId xmlns:a16="http://schemas.microsoft.com/office/drawing/2014/main" id="{3EBE1F42-153B-B681-BC07-F2CE5713EEBD}"/>
               </a:ext>
             </a:extLst>
           </p:cNvPr>
@@ -3336,7 +3336,7 @@
           <p:cNvPr id="6" name="コンテンツ プレースホルダー 5">
             <a:extLst>
               <a:ext uri="{FF2B5EF4-FFF2-40B4-BE49-F238E27FC236}">
-                <a16:creationId xmlns:a16="http://schemas.microsoft.com/office/drawing/2014/main" id="{96828561-64AE-DBCB-B6AA-4C4F1A8F9ECA}"/>
+                <a16:creationId xmlns:a16="http://schemas.microsoft.com/office/drawing/2014/main" id="{D38E6D85-34E5-4E46-0D73-E4338B424646}"/>
               </a:ext>
             </a:extLst>
           </p:cNvPr>
@@ -3430,7 +3430,7 @@
           <p:cNvPr id="7" name="日付プレースホルダー 6">
             <a:extLst>
               <a:ext uri="{FF2B5EF4-FFF2-40B4-BE49-F238E27FC236}">
-                <a16:creationId xmlns:a16="http://schemas.microsoft.com/office/drawing/2014/main" id="{957D5B3E-800C-8D90-8A75-24B5F896DCDA}"/>
+                <a16:creationId xmlns:a16="http://schemas.microsoft.com/office/drawing/2014/main" id="{40F4839F-6746-FB7A-2605-D00DE3AD7A6C}"/>
               </a:ext>
             </a:extLst>
           </p:cNvPr>
@@ -3446,7 +3446,7 @@
           <a:bodyPr/>
           <a:lstStyle/>
           <a:p>
-            <a:fld id="{953AA427-D7FD-4C74-8FA9-E94E52A66923}" type="datetimeFigureOut">
+            <a:fld id="{41C390E4-A52A-43AE-970C-3906C9BD5394}" type="datetimeFigureOut">
               <a:rPr kumimoji="1" lang="ja-JP" altLang="en-US" smtClean="0"/>
               <a:t>2026/9/20</a:t>
             </a:fld>
@@ -3459,7 +3459,7 @@
           <p:cNvPr id="8" name="フッター プレースホルダー 7">
             <a:extLst>
               <a:ext uri="{FF2B5EF4-FFF2-40B4-BE49-F238E27FC236}">
-                <a16:creationId xmlns:a16="http://schemas.microsoft.com/office/drawing/2014/main" id="{0D9A7B7C-F5EA-FFD2-91DE-DE7475D32DC3}"/>
+                <a16:creationId xmlns:a16="http://schemas.microsoft.com/office/drawing/2014/main" id="{983D2450-9166-C73E-9EE7-3471401EA7A3}"/>
               </a:ext>
             </a:extLst>
           </p:cNvPr>
@@ -3484,7 +3484,7 @@
           <p:cNvPr id="9" name="スライド番号プレースホルダー 8">
             <a:extLst>
               <a:ext uri="{FF2B5EF4-FFF2-40B4-BE49-F238E27FC236}">
-                <a16:creationId xmlns:a16="http://schemas.microsoft.com/office/drawing/2014/main" id="{C29BA8BA-AFFC-4600-17F3-BC1C88208EFE}"/>
+                <a16:creationId xmlns:a16="http://schemas.microsoft.com/office/drawing/2014/main" id="{BCC09DA4-F22A-DA98-DC57-7340BF0F91F8}"/>
               </a:ext>
             </a:extLst>
           </p:cNvPr>
@@ -3500,7 +3500,7 @@
           <a:bodyPr/>
           <a:lstStyle/>
           <a:p>
-            <a:fld id="{6CA20B12-B2B9-4A31-BD02-1320745D9B7B}" type="slidenum">
+            <a:fld id="{DAD30DFD-62C4-4ADF-98A6-152EB2A2F554}" type="slidenum">
               <a:rPr kumimoji="1" lang="ja-JP" altLang="en-US" smtClean="0"/>
               <a:t>‹#›</a:t>
             </a:fld>
@@ -3511,7 +3511,7 @@
     </p:spTree>
     <p:extLst>
       <p:ext uri="{BB962C8B-B14F-4D97-AF65-F5344CB8AC3E}">
-        <p14:creationId xmlns:p14="http://schemas.microsoft.com/office/powerpoint/2010/main" val="2851132109"/>
+        <p14:creationId xmlns:p14="http://schemas.microsoft.com/office/powerpoint/2010/main" val="1246760449"/>
       </p:ext>
     </p:extLst>
   </p:cSld>
@@ -3543,7 +3543,7 @@
           <p:cNvPr id="2" name="タイトル 1">
             <a:extLst>
               <a:ext uri="{FF2B5EF4-FFF2-40B4-BE49-F238E27FC236}">
-                <a16:creationId xmlns:a16="http://schemas.microsoft.com/office/drawing/2014/main" id="{89344F0E-DFBE-2114-C856-BE7B3F064031}"/>
+                <a16:creationId xmlns:a16="http://schemas.microsoft.com/office/drawing/2014/main" id="{4E8BFD67-2507-A004-C0D9-2444A47F9459}"/>
               </a:ext>
             </a:extLst>
           </p:cNvPr>
@@ -3571,7 +3571,7 @@
           <p:cNvPr id="3" name="日付プレースホルダー 2">
             <a:extLst>
               <a:ext uri="{FF2B5EF4-FFF2-40B4-BE49-F238E27FC236}">
-                <a16:creationId xmlns:a16="http://schemas.microsoft.com/office/drawing/2014/main" id="{C70AC083-C5D3-563F-89F7-1DD0CB48335C}"/>
+                <a16:creationId xmlns:a16="http://schemas.microsoft.com/office/drawing/2014/main" id="{1944C9CE-BA87-F577-34D0-79ED957EB5A8}"/>
               </a:ext>
             </a:extLst>
           </p:cNvPr>
@@ -3587,7 +3587,7 @@
           <a:bodyPr/>
           <a:lstStyle/>
           <a:p>
-            <a:fld id="{953AA427-D7FD-4C74-8FA9-E94E52A66923}" type="datetimeFigureOut">
+            <a:fld id="{41C390E4-A52A-43AE-970C-3906C9BD5394}" type="datetimeFigureOut">
               <a:rPr kumimoji="1" lang="ja-JP" altLang="en-US" smtClean="0"/>
               <a:t>2026/9/20</a:t>
             </a:fld>
@@ -3600,7 +3600,7 @@
           <p:cNvPr id="4" name="フッター プレースホルダー 3">
             <a:extLst>
               <a:ext uri="{FF2B5EF4-FFF2-40B4-BE49-F238E27FC236}">
-                <a16:creationId xmlns:a16="http://schemas.microsoft.com/office/drawing/2014/main" id="{D86C1977-CA86-41CD-46C7-FBDC4EAB7887}"/>
+                <a16:creationId xmlns:a16="http://schemas.microsoft.com/office/drawing/2014/main" id="{A3F0C7D0-338C-0C73-3C96-E2C3DC9FC75E}"/>
               </a:ext>
             </a:extLst>
           </p:cNvPr>
@@ -3625,7 +3625,7 @@
           <p:cNvPr id="5" name="スライド番号プレースホルダー 4">
             <a:extLst>
               <a:ext uri="{FF2B5EF4-FFF2-40B4-BE49-F238E27FC236}">
-                <a16:creationId xmlns:a16="http://schemas.microsoft.com/office/drawing/2014/main" id="{EBDB5FAE-6A24-7F4B-4B3D-D77E1103983B}"/>
+                <a16:creationId xmlns:a16="http://schemas.microsoft.com/office/drawing/2014/main" id="{6F825B1C-A3D9-B44B-063E-6F0BD0716805}"/>
               </a:ext>
             </a:extLst>
           </p:cNvPr>
@@ -3641,7 +3641,7 @@
           <a:bodyPr/>
           <a:lstStyle/>
           <a:p>
-            <a:fld id="{6CA20B12-B2B9-4A31-BD02-1320745D9B7B}" type="slidenum">
+            <a:fld id="{DAD30DFD-62C4-4ADF-98A6-152EB2A2F554}" type="slidenum">
               <a:rPr kumimoji="1" lang="ja-JP" altLang="en-US" smtClean="0"/>
               <a:t>‹#›</a:t>
             </a:fld>
@@ -3652,7 +3652,7 @@
     </p:spTree>
     <p:extLst>
       <p:ext uri="{BB962C8B-B14F-4D97-AF65-F5344CB8AC3E}">
-        <p14:creationId xmlns:p14="http://schemas.microsoft.com/office/powerpoint/2010/main" val="1148755664"/>
+        <p14:creationId xmlns:p14="http://schemas.microsoft.com/office/powerpoint/2010/main" val="2934870431"/>
       </p:ext>
     </p:extLst>
   </p:cSld>
@@ -3684,7 +3684,7 @@
           <p:cNvPr id="2" name="日付プレースホルダー 1">
             <a:extLst>
               <a:ext uri="{FF2B5EF4-FFF2-40B4-BE49-F238E27FC236}">
-                <a16:creationId xmlns:a16="http://schemas.microsoft.com/office/drawing/2014/main" id="{0E53554F-B047-246F-78C7-F1AAC98C7201}"/>
+                <a16:creationId xmlns:a16="http://schemas.microsoft.com/office/drawing/2014/main" id="{852E4E56-AED6-C95F-AB6F-3B45845CB0CA}"/>
               </a:ext>
             </a:extLst>
           </p:cNvPr>
@@ -3700,7 +3700,7 @@
           <a:bodyPr/>
           <a:lstStyle/>
           <a:p>
-            <a:fld id="{953AA427-D7FD-4C74-8FA9-E94E52A66923}" type="datetimeFigureOut">
+            <a:fld id="{41C390E4-A52A-43AE-970C-3906C9BD5394}" type="datetimeFigureOut">
               <a:rPr kumimoji="1" lang="ja-JP" altLang="en-US" smtClean="0"/>
               <a:t>2026/9/20</a:t>
             </a:fld>
@@ -3713,7 +3713,7 @@
           <p:cNvPr id="3" name="フッター プレースホルダー 2">
             <a:extLst>
               <a:ext uri="{FF2B5EF4-FFF2-40B4-BE49-F238E27FC236}">
-                <a16:creationId xmlns:a16="http://schemas.microsoft.com/office/drawing/2014/main" id="{6CB00173-F19D-8F89-40F9-D7A14793BE30}"/>
+                <a16:creationId xmlns:a16="http://schemas.microsoft.com/office/drawing/2014/main" id="{C6916CED-1D90-79FC-9660-85EB0C4EC9CA}"/>
               </a:ext>
             </a:extLst>
           </p:cNvPr>
@@ -3738,7 +3738,7 @@
           <p:cNvPr id="4" name="スライド番号プレースホルダー 3">
             <a:extLst>
               <a:ext uri="{FF2B5EF4-FFF2-40B4-BE49-F238E27FC236}">
-                <a16:creationId xmlns:a16="http://schemas.microsoft.com/office/drawing/2014/main" id="{0BC32CE2-11DD-B006-43BA-BDE93C27D8C6}"/>
+                <a16:creationId xmlns:a16="http://schemas.microsoft.com/office/drawing/2014/main" id="{DFA05A71-B63A-FF1C-DF3A-BF4640E42D3F}"/>
               </a:ext>
             </a:extLst>
           </p:cNvPr>
@@ -3754,7 +3754,7 @@
           <a:bodyPr/>
           <a:lstStyle/>
           <a:p>
-            <a:fld id="{6CA20B12-B2B9-4A31-BD02-1320745D9B7B}" type="slidenum">
+            <a:fld id="{DAD30DFD-62C4-4ADF-98A6-152EB2A2F554}" type="slidenum">
               <a:rPr kumimoji="1" lang="ja-JP" altLang="en-US" smtClean="0"/>
               <a:t>‹#›</a:t>
             </a:fld>
@@ -3765,7 +3765,7 @@
     </p:spTree>
     <p:extLst>
       <p:ext uri="{BB962C8B-B14F-4D97-AF65-F5344CB8AC3E}">
-        <p14:creationId xmlns:p14="http://schemas.microsoft.com/office/powerpoint/2010/main" val="99622527"/>
+        <p14:creationId xmlns:p14="http://schemas.microsoft.com/office/powerpoint/2010/main" val="3631987808"/>
       </p:ext>
     </p:extLst>
   </p:cSld>
@@ -3797,7 +3797,7 @@
           <p:cNvPr id="2" name="タイトル 1">
             <a:extLst>
               <a:ext uri="{FF2B5EF4-FFF2-40B4-BE49-F238E27FC236}">
-                <a16:creationId xmlns:a16="http://schemas.microsoft.com/office/drawing/2014/main" id="{A9C20EBB-9061-3682-A5E7-1E494C6C5332}"/>
+                <a16:creationId xmlns:a16="http://schemas.microsoft.com/office/drawing/2014/main" id="{D63888AB-6B7D-CA9E-F43E-290F5D8CC414}"/>
               </a:ext>
             </a:extLst>
           </p:cNvPr>
@@ -3834,7 +3834,7 @@
           <p:cNvPr id="3" name="コンテンツ プレースホルダー 2">
             <a:extLst>
               <a:ext uri="{FF2B5EF4-FFF2-40B4-BE49-F238E27FC236}">
-                <a16:creationId xmlns:a16="http://schemas.microsoft.com/office/drawing/2014/main" id="{B3480F3F-9901-9731-16EA-0520DFD4E62F}"/>
+                <a16:creationId xmlns:a16="http://schemas.microsoft.com/office/drawing/2014/main" id="{FCC140AC-A9E4-1F5B-2C6E-9D67C63957B7}"/>
               </a:ext>
             </a:extLst>
           </p:cNvPr>
@@ -3956,7 +3956,7 @@
           <p:cNvPr id="4" name="テキスト プレースホルダー 3">
             <a:extLst>
               <a:ext uri="{FF2B5EF4-FFF2-40B4-BE49-F238E27FC236}">
-                <a16:creationId xmlns:a16="http://schemas.microsoft.com/office/drawing/2014/main" id="{3B500F28-C0DA-D42D-7C0F-7B5FBA08F0F1}"/>
+                <a16:creationId xmlns:a16="http://schemas.microsoft.com/office/drawing/2014/main" id="{F6D1CDDA-1FDD-F54D-383B-06BA82060254}"/>
               </a:ext>
             </a:extLst>
           </p:cNvPr>
@@ -4027,7 +4027,7 @@
           <p:cNvPr id="5" name="日付プレースホルダー 4">
             <a:extLst>
               <a:ext uri="{FF2B5EF4-FFF2-40B4-BE49-F238E27FC236}">
-                <a16:creationId xmlns:a16="http://schemas.microsoft.com/office/drawing/2014/main" id="{CED1EA29-243E-4F22-3B61-43151BA06E90}"/>
+                <a16:creationId xmlns:a16="http://schemas.microsoft.com/office/drawing/2014/main" id="{5465102D-BBE0-1F58-C9D6-9F5C00CD6309}"/>
               </a:ext>
             </a:extLst>
           </p:cNvPr>
@@ -4043,7 +4043,7 @@
           <a:bodyPr/>
           <a:lstStyle/>
           <a:p>
-            <a:fld id="{953AA427-D7FD-4C74-8FA9-E94E52A66923}" type="datetimeFigureOut">
+            <a:fld id="{41C390E4-A52A-43AE-970C-3906C9BD5394}" type="datetimeFigureOut">
               <a:rPr kumimoji="1" lang="ja-JP" altLang="en-US" smtClean="0"/>
               <a:t>2026/9/20</a:t>
             </a:fld>
@@ -4056,7 +4056,7 @@
           <p:cNvPr id="6" name="フッター プレースホルダー 5">
             <a:extLst>
               <a:ext uri="{FF2B5EF4-FFF2-40B4-BE49-F238E27FC236}">
-                <a16:creationId xmlns:a16="http://schemas.microsoft.com/office/drawing/2014/main" id="{EBAC11E6-B6AE-5E44-9489-618349AE6441}"/>
+                <a16:creationId xmlns:a16="http://schemas.microsoft.com/office/drawing/2014/main" id="{A4D5B5E8-5273-8B10-8A8D-B18089605BEC}"/>
               </a:ext>
             </a:extLst>
           </p:cNvPr>
@@ -4081,7 +4081,7 @@
           <p:cNvPr id="7" name="スライド番号プレースホルダー 6">
             <a:extLst>
               <a:ext uri="{FF2B5EF4-FFF2-40B4-BE49-F238E27FC236}">
-                <a16:creationId xmlns:a16="http://schemas.microsoft.com/office/drawing/2014/main" id="{050D8087-B062-427E-92F5-427007BE2FFE}"/>
+                <a16:creationId xmlns:a16="http://schemas.microsoft.com/office/drawing/2014/main" id="{27878574-93B2-4D48-246F-406C717E8976}"/>
               </a:ext>
             </a:extLst>
           </p:cNvPr>
@@ -4097,7 +4097,7 @@
           <a:bodyPr/>
           <a:lstStyle/>
           <a:p>
-            <a:fld id="{6CA20B12-B2B9-4A31-BD02-1320745D9B7B}" type="slidenum">
+            <a:fld id="{DAD30DFD-62C4-4ADF-98A6-152EB2A2F554}" type="slidenum">
               <a:rPr kumimoji="1" lang="ja-JP" altLang="en-US" smtClean="0"/>
               <a:t>‹#›</a:t>
             </a:fld>
@@ -4108,7 +4108,7 @@
     </p:spTree>
     <p:extLst>
       <p:ext uri="{BB962C8B-B14F-4D97-AF65-F5344CB8AC3E}">
-        <p14:creationId xmlns:p14="http://schemas.microsoft.com/office/powerpoint/2010/main" val="964487615"/>
+        <p14:creationId xmlns:p14="http://schemas.microsoft.com/office/powerpoint/2010/main" val="1395924010"/>
       </p:ext>
     </p:extLst>
   </p:cSld>
@@ -4140,7 +4140,7 @@
           <p:cNvPr id="2" name="タイトル 1">
             <a:extLst>
               <a:ext uri="{FF2B5EF4-FFF2-40B4-BE49-F238E27FC236}">
-                <a16:creationId xmlns:a16="http://schemas.microsoft.com/office/drawing/2014/main" id="{7D9A78FA-87CB-E174-2391-4AB576BAA9F7}"/>
+                <a16:creationId xmlns:a16="http://schemas.microsoft.com/office/drawing/2014/main" id="{5E25837A-75FF-AF55-ECAE-972B6E7ECE90}"/>
               </a:ext>
             </a:extLst>
           </p:cNvPr>
@@ -4177,7 +4177,7 @@
           <p:cNvPr id="3" name="図プレースホルダー 2">
             <a:extLst>
               <a:ext uri="{FF2B5EF4-FFF2-40B4-BE49-F238E27FC236}">
-                <a16:creationId xmlns:a16="http://schemas.microsoft.com/office/drawing/2014/main" id="{4FCEA80E-58D1-371F-F473-403A52E9EC91}"/>
+                <a16:creationId xmlns:a16="http://schemas.microsoft.com/office/drawing/2014/main" id="{D751824B-A36E-95D4-64FF-E50D8028BAEB}"/>
               </a:ext>
             </a:extLst>
           </p:cNvPr>
@@ -4244,7 +4244,7 @@
           <p:cNvPr id="4" name="テキスト プレースホルダー 3">
             <a:extLst>
               <a:ext uri="{FF2B5EF4-FFF2-40B4-BE49-F238E27FC236}">
-                <a16:creationId xmlns:a16="http://schemas.microsoft.com/office/drawing/2014/main" id="{01E3FF37-4656-2F4B-274E-4FC1A9C98E5D}"/>
+                <a16:creationId xmlns:a16="http://schemas.microsoft.com/office/drawing/2014/main" id="{7FC6DFC6-BB4C-EAE4-D0DA-904D09A37436}"/>
               </a:ext>
             </a:extLst>
           </p:cNvPr>
@@ -4315,7 +4315,7 @@
           <p:cNvPr id="5" name="日付プレースホルダー 4">
             <a:extLst>
               <a:ext uri="{FF2B5EF4-FFF2-40B4-BE49-F238E27FC236}">
-                <a16:creationId xmlns:a16="http://schemas.microsoft.com/office/drawing/2014/main" id="{402AE735-0170-9C64-B798-ABE74A052E86}"/>
+                <a16:creationId xmlns:a16="http://schemas.microsoft.com/office/drawing/2014/main" id="{F0EAC2C0-D4F6-A164-0D18-5F978C10D48C}"/>
               </a:ext>
             </a:extLst>
           </p:cNvPr>
@@ -4331,7 +4331,7 @@
           <a:bodyPr/>
           <a:lstStyle/>
           <a:p>
-            <a:fld id="{953AA427-D7FD-4C74-8FA9-E94E52A66923}" type="datetimeFigureOut">
+            <a:fld id="{41C390E4-A52A-43AE-970C-3906C9BD5394}" type="datetimeFigureOut">
               <a:rPr kumimoji="1" lang="ja-JP" altLang="en-US" smtClean="0"/>
               <a:t>2026/9/20</a:t>
             </a:fld>
@@ -4344,7 +4344,7 @@
           <p:cNvPr id="6" name="フッター プレースホルダー 5">
             <a:extLst>
               <a:ext uri="{FF2B5EF4-FFF2-40B4-BE49-F238E27FC236}">
-                <a16:creationId xmlns:a16="http://schemas.microsoft.com/office/drawing/2014/main" id="{960CF731-41A5-6243-57DB-9A360CD1FAF0}"/>
+                <a16:creationId xmlns:a16="http://schemas.microsoft.com/office/drawing/2014/main" id="{41C44BB0-1BAE-9D90-5AB6-E4D530564F6E}"/>
               </a:ext>
             </a:extLst>
           </p:cNvPr>
@@ -4369,7 +4369,7 @@
           <p:cNvPr id="7" name="スライド番号プレースホルダー 6">
             <a:extLst>
               <a:ext uri="{FF2B5EF4-FFF2-40B4-BE49-F238E27FC236}">
-                <a16:creationId xmlns:a16="http://schemas.microsoft.com/office/drawing/2014/main" id="{6174E255-8C26-6D73-7621-9AD860866AAD}"/>
+                <a16:creationId xmlns:a16="http://schemas.microsoft.com/office/drawing/2014/main" id="{9E6C9DBF-1DEE-C816-6D49-43E7697578FB}"/>
               </a:ext>
             </a:extLst>
           </p:cNvPr>
@@ -4385,7 +4385,7 @@
           <a:bodyPr/>
           <a:lstStyle/>
           <a:p>
-            <a:fld id="{6CA20B12-B2B9-4A31-BD02-1320745D9B7B}" type="slidenum">
+            <a:fld id="{DAD30DFD-62C4-4ADF-98A6-152EB2A2F554}" type="slidenum">
               <a:rPr kumimoji="1" lang="ja-JP" altLang="en-US" smtClean="0"/>
               <a:t>‹#›</a:t>
             </a:fld>
@@ -4396,7 +4396,7 @@
     </p:spTree>
     <p:extLst>
       <p:ext uri="{BB962C8B-B14F-4D97-AF65-F5344CB8AC3E}">
-        <p14:creationId xmlns:p14="http://schemas.microsoft.com/office/powerpoint/2010/main" val="1319429947"/>
+        <p14:creationId xmlns:p14="http://schemas.microsoft.com/office/powerpoint/2010/main" val="2031672031"/>
       </p:ext>
     </p:extLst>
   </p:cSld>
@@ -4433,7 +4433,7 @@
           <p:cNvPr id="2" name="タイトル プレースホルダー 1">
             <a:extLst>
               <a:ext uri="{FF2B5EF4-FFF2-40B4-BE49-F238E27FC236}">
-                <a16:creationId xmlns:a16="http://schemas.microsoft.com/office/drawing/2014/main" id="{67AC3D34-042F-5701-41E1-6AB14402F1C3}"/>
+                <a16:creationId xmlns:a16="http://schemas.microsoft.com/office/drawing/2014/main" id="{2E715760-9C08-A86D-EC86-4631B016CABA}"/>
               </a:ext>
             </a:extLst>
           </p:cNvPr>
@@ -4471,7 +4471,7 @@
           <p:cNvPr id="3" name="テキスト プレースホルダー 2">
             <a:extLst>
               <a:ext uri="{FF2B5EF4-FFF2-40B4-BE49-F238E27FC236}">
-                <a16:creationId xmlns:a16="http://schemas.microsoft.com/office/drawing/2014/main" id="{2A176B5C-B7A0-733F-3F48-1F4BAE8726BF}"/>
+                <a16:creationId xmlns:a16="http://schemas.microsoft.com/office/drawing/2014/main" id="{B3E5A25C-128F-076B-4DA2-D096493CF835}"/>
               </a:ext>
             </a:extLst>
           </p:cNvPr>
@@ -4570,7 +4570,7 @@
           <p:cNvPr id="4" name="日付プレースホルダー 3">
             <a:extLst>
               <a:ext uri="{FF2B5EF4-FFF2-40B4-BE49-F238E27FC236}">
-                <a16:creationId xmlns:a16="http://schemas.microsoft.com/office/drawing/2014/main" id="{89D5ADEA-0B0D-0E49-86D2-15BFED45D480}"/>
+                <a16:creationId xmlns:a16="http://schemas.microsoft.com/office/drawing/2014/main" id="{59EA7670-B950-05BF-027E-8762963AD7AF}"/>
               </a:ext>
             </a:extLst>
           </p:cNvPr>
@@ -4604,7 +4604,7 @@
             </a:lvl1pPr>
           </a:lstStyle>
           <a:p>
-            <a:fld id="{953AA427-D7FD-4C74-8FA9-E94E52A66923}" type="datetimeFigureOut">
+            <a:fld id="{41C390E4-A52A-43AE-970C-3906C9BD5394}" type="datetimeFigureOut">
               <a:rPr kumimoji="1" lang="ja-JP" altLang="en-US" smtClean="0"/>
               <a:t>2026/9/20</a:t>
             </a:fld>
@@ -4617,7 +4617,7 @@
           <p:cNvPr id="5" name="フッター プレースホルダー 4">
             <a:extLst>
               <a:ext uri="{FF2B5EF4-FFF2-40B4-BE49-F238E27FC236}">
-                <a16:creationId xmlns:a16="http://schemas.microsoft.com/office/drawing/2014/main" id="{17FEC3EB-0470-8E44-F7A8-26BF8FB2F20C}"/>
+                <a16:creationId xmlns:a16="http://schemas.microsoft.com/office/drawing/2014/main" id="{297E1BBD-E24B-314D-1016-F44D00D428F1}"/>
               </a:ext>
             </a:extLst>
           </p:cNvPr>
@@ -4660,7 +4660,7 @@
           <p:cNvPr id="6" name="スライド番号プレースホルダー 5">
             <a:extLst>
               <a:ext uri="{FF2B5EF4-FFF2-40B4-BE49-F238E27FC236}">
-                <a16:creationId xmlns:a16="http://schemas.microsoft.com/office/drawing/2014/main" id="{9988E3BE-E474-70F9-F0A9-6FBC39AF8337}"/>
+                <a16:creationId xmlns:a16="http://schemas.microsoft.com/office/drawing/2014/main" id="{6189771E-2DE8-B3DA-90CF-BF1F935F86E2}"/>
               </a:ext>
             </a:extLst>
           </p:cNvPr>
@@ -4694,7 +4694,7 @@
             </a:lvl1pPr>
           </a:lstStyle>
           <a:p>
-            <a:fld id="{6CA20B12-B2B9-4A31-BD02-1320745D9B7B}" type="slidenum">
+            <a:fld id="{DAD30DFD-62C4-4ADF-98A6-152EB2A2F554}" type="slidenum">
               <a:rPr kumimoji="1" lang="ja-JP" altLang="en-US" smtClean="0"/>
               <a:t>‹#›</a:t>
             </a:fld>
@@ -4707,7 +4707,7 @@
           <p:cNvPr id="7" name="テキスト ボックス 6">
             <a:extLst>
               <a:ext uri="{FF2B5EF4-FFF2-40B4-BE49-F238E27FC236}">
-                <a16:creationId xmlns:a16="http://schemas.microsoft.com/office/drawing/2014/main" id="{6103BD37-A4A0-0B8A-01A2-41FF068C89AD}"/>
+                <a16:creationId xmlns:a16="http://schemas.microsoft.com/office/drawing/2014/main" id="{C58B4FE6-C2FF-81E2-2BAA-9D85BA5235E6}"/>
               </a:ext>
             </a:extLst>
           </p:cNvPr>
@@ -4744,7 +4744,7 @@
     </p:spTree>
     <p:extLst>
       <p:ext uri="{BB962C8B-B14F-4D97-AF65-F5344CB8AC3E}">
-        <p14:creationId xmlns:p14="http://schemas.microsoft.com/office/powerpoint/2010/main" val="2618178379"/>
+        <p14:creationId xmlns:p14="http://schemas.microsoft.com/office/powerpoint/2010/main" val="3167177552"/>
       </p:ext>
     </p:extLst>
   </p:cSld>
@@ -5068,7 +5068,7 @@
           <p:cNvPr id="2" name="タイトル 1">
             <a:extLst>
               <a:ext uri="{FF2B5EF4-FFF2-40B4-BE49-F238E27FC236}">
-                <a16:creationId xmlns:a16="http://schemas.microsoft.com/office/drawing/2014/main" id="{E6295362-C2C7-3F05-38F7-F56F0E4AD4AD}"/>
+                <a16:creationId xmlns:a16="http://schemas.microsoft.com/office/drawing/2014/main" id="{6AD30A5A-FA5A-F03A-B7B2-627D74F5A86A}"/>
               </a:ext>
             </a:extLst>
           </p:cNvPr>
@@ -5100,7 +5100,7 @@
           <p:cNvPr id="3" name="テキスト プレースホルダー 2">
             <a:extLst>
               <a:ext uri="{FF2B5EF4-FFF2-40B4-BE49-F238E27FC236}">
-                <a16:creationId xmlns:a16="http://schemas.microsoft.com/office/drawing/2014/main" id="{D1EB2A94-B625-F647-D21B-F82397CCA9C8}"/>
+                <a16:creationId xmlns:a16="http://schemas.microsoft.com/office/drawing/2014/main" id="{4F71601E-CA39-BDEA-CECC-0D312B722A1D}"/>
               </a:ext>
             </a:extLst>
           </p:cNvPr>
@@ -5215,7 +5215,7 @@
     </p:spTree>
     <p:extLst>
       <p:ext uri="{BB962C8B-B14F-4D97-AF65-F5344CB8AC3E}">
-        <p14:creationId xmlns:p14="http://schemas.microsoft.com/office/powerpoint/2010/main" val="474193461"/>
+        <p14:creationId xmlns:p14="http://schemas.microsoft.com/office/powerpoint/2010/main" val="394378774"/>
       </p:ext>
     </p:extLst>
   </p:cSld>
@@ -5247,7 +5247,7 @@
           <p:cNvPr id="2" name="タイトル 1">
             <a:extLst>
               <a:ext uri="{FF2B5EF4-FFF2-40B4-BE49-F238E27FC236}">
-                <a16:creationId xmlns:a16="http://schemas.microsoft.com/office/drawing/2014/main" id="{0857EAE1-4C1D-3E70-2804-B53890D395DD}"/>
+                <a16:creationId xmlns:a16="http://schemas.microsoft.com/office/drawing/2014/main" id="{9DCCC73A-ACFD-AD1C-5DFA-B331C4CF8493}"/>
               </a:ext>
             </a:extLst>
           </p:cNvPr>
@@ -5279,7 +5279,7 @@
           <p:cNvPr id="3" name="正方形/長方形 2">
             <a:extLst>
               <a:ext uri="{FF2B5EF4-FFF2-40B4-BE49-F238E27FC236}">
-                <a16:creationId xmlns:a16="http://schemas.microsoft.com/office/drawing/2014/main" id="{4F4D39B6-74E5-79C3-3899-8BB21C8FA6F4}"/>
+                <a16:creationId xmlns:a16="http://schemas.microsoft.com/office/drawing/2014/main" id="{708EB298-7BB4-249B-6711-9AB336EAA28A}"/>
               </a:ext>
             </a:extLst>
           </p:cNvPr>
@@ -5365,7 +5365,7 @@
           <p:cNvPr id="5" name="図 4" descr="TC28 画像の代替テキスト">
             <a:extLst>
               <a:ext uri="{FF2B5EF4-FFF2-40B4-BE49-F238E27FC236}">
-                <a16:creationId xmlns:a16="http://schemas.microsoft.com/office/drawing/2014/main" id="{01C41A18-196D-6D24-74B6-4ACC3C25800D}"/>
+                <a16:creationId xmlns:a16="http://schemas.microsoft.com/office/drawing/2014/main" id="{52C5B2A1-E6CF-22A3-1037-AF5B5671347A}"/>
               </a:ext>
             </a:extLst>
           </p:cNvPr>
@@ -5401,7 +5401,7 @@
           <p:cNvPr id="6" name="日付プレースホルダー 5">
             <a:extLst>
               <a:ext uri="{FF2B5EF4-FFF2-40B4-BE49-F238E27FC236}">
-                <a16:creationId xmlns:a16="http://schemas.microsoft.com/office/drawing/2014/main" id="{A5025BEA-1A93-9AF2-922F-1EC7C410292F}"/>
+                <a16:creationId xmlns:a16="http://schemas.microsoft.com/office/drawing/2014/main" id="{4B01593D-85BC-205F-E2A7-01BD1C9ECB05}"/>
               </a:ext>
             </a:extLst>
           </p:cNvPr>
@@ -5433,7 +5433,7 @@
           <p:cNvPr id="7" name="スライド番号プレースホルダー 6">
             <a:extLst>
               <a:ext uri="{FF2B5EF4-FFF2-40B4-BE49-F238E27FC236}">
-                <a16:creationId xmlns:a16="http://schemas.microsoft.com/office/drawing/2014/main" id="{7397B39B-87BE-D17C-4F28-CCCF3F42CCFA}"/>
+                <a16:creationId xmlns:a16="http://schemas.microsoft.com/office/drawing/2014/main" id="{0900941E-B0EE-3E5C-C24E-BD55375072E7}"/>
               </a:ext>
             </a:extLst>
           </p:cNvPr>
@@ -5449,7 +5449,7 @@
           <a:bodyPr/>
           <a:lstStyle/>
           <a:p>
-            <a:fld id="{6CA20B12-B2B9-4A31-BD02-1320745D9B7B}" type="slidenum">
+            <a:fld id="{DAD30DFD-62C4-4ADF-98A6-152EB2A2F554}" type="slidenum">
               <a:rPr kumimoji="1" lang="ja-JP" altLang="en-US" smtClean="0"/>
               <a:t>2</a:t>
             </a:fld>
@@ -5460,7 +5460,7 @@
     </p:spTree>
     <p:extLst>
       <p:ext uri="{BB962C8B-B14F-4D97-AF65-F5344CB8AC3E}">
-        <p14:creationId xmlns:p14="http://schemas.microsoft.com/office/powerpoint/2010/main" val="302698687"/>
+        <p14:creationId xmlns:p14="http://schemas.microsoft.com/office/powerpoint/2010/main" val="2979118395"/>
       </p:ext>
     </p:extLst>
   </p:cSld>
@@ -5492,7 +5492,7 @@
           <p:cNvPr id="2" name="タイトル 1">
             <a:extLst>
               <a:ext uri="{FF2B5EF4-FFF2-40B4-BE49-F238E27FC236}">
-                <a16:creationId xmlns:a16="http://schemas.microsoft.com/office/drawing/2014/main" id="{E51588BC-1AED-3373-3003-C785A5A64FBB}"/>
+                <a16:creationId xmlns:a16="http://schemas.microsoft.com/office/drawing/2014/main" id="{AC167438-2BC0-8647-E338-4A197B5883FC}"/>
               </a:ext>
             </a:extLst>
           </p:cNvPr>
@@ -5522,7 +5522,7 @@
     </p:spTree>
     <p:extLst>
       <p:ext uri="{BB962C8B-B14F-4D97-AF65-F5344CB8AC3E}">
-        <p14:creationId xmlns:p14="http://schemas.microsoft.com/office/powerpoint/2010/main" val="746412488"/>
+        <p14:creationId xmlns:p14="http://schemas.microsoft.com/office/powerpoint/2010/main" val="4250446790"/>
       </p:ext>
     </p:extLst>
   </p:cSld>
@@ -5554,7 +5554,7 @@
           <p:cNvPr id="2" name="タイトル 1">
             <a:extLst>
               <a:ext uri="{FF2B5EF4-FFF2-40B4-BE49-F238E27FC236}">
-                <a16:creationId xmlns:a16="http://schemas.microsoft.com/office/drawing/2014/main" id="{FA620E3F-F702-7DE3-73E8-7BC541C00A7B}"/>
+                <a16:creationId xmlns:a16="http://schemas.microsoft.com/office/drawing/2014/main" id="{2F8D35DD-A0D1-C3E1-07A5-3A137D0F1D84}"/>
               </a:ext>
             </a:extLst>
           </p:cNvPr>
@@ -5584,7 +5584,7 @@
     </p:spTree>
     <p:extLst>
       <p:ext uri="{BB962C8B-B14F-4D97-AF65-F5344CB8AC3E}">
-        <p14:creationId xmlns:p14="http://schemas.microsoft.com/office/powerpoint/2010/main" val="1829372479"/>
+        <p14:creationId xmlns:p14="http://schemas.microsoft.com/office/powerpoint/2010/main" val="3862331269"/>
       </p:ext>
     </p:extLst>
   </p:cSld>
